--- a/Docs/Project PPT.pptx
+++ b/Docs/Project PPT.pptx
@@ -10519,7 +10519,7 @@
           </p:nvSpPr>
           <p:spPr>
             <a:xfrm>
-              <a:off x="312424" y="3433636"/>
+              <a:off x="312424" y="3356992"/>
               <a:ext cx="3960160" cy="540000"/>
             </a:xfrm>
             <a:prstGeom prst="rect">
@@ -10538,9 +10538,8 @@
                     <a:srgbClr val="2C3E50"/>
                   </a:solidFill>
                 </a:rPr>
-                <a:t>Smart Job Matching</a:t>
+                <a:t>Job Search &amp; Filtering</a:t>
               </a:r>
-              <a:endParaRPr lang="en-US" sz="1600" dirty="0"/>
             </a:p>
             <a:p>
               <a:r>
@@ -10549,7 +10548,7 @@
                     <a:srgbClr val="2C3E50"/>
                   </a:solidFill>
                 </a:rPr>
-                <a:t>AI-powered recommendations based on expertise</a:t>
+                <a:t>Browse and filter projects by skill, budget, and category</a:t>
               </a:r>
               <a:endParaRPr lang="en-US" sz="1400" dirty="0"/>
             </a:p>
@@ -10590,7 +10589,6 @@
                 </a:rPr>
                 <a:t>Portfolio Showcase</a:t>
               </a:r>
-              <a:endParaRPr lang="en-US" sz="1600" dirty="0"/>
             </a:p>
             <a:p>
               <a:r>
@@ -10619,7 +10617,7 @@
           </p:nvSpPr>
           <p:spPr>
             <a:xfrm>
-              <a:off x="323808" y="5157192"/>
+              <a:off x="323808" y="5085184"/>
               <a:ext cx="3960160" cy="540000"/>
             </a:xfrm>
             <a:prstGeom prst="rect">
@@ -10641,9 +10639,8 @@
                     <a:srgbClr val="2C3E50"/>
                   </a:solidFill>
                 </a:rPr>
-                <a:t>Comprehensive Profiles</a:t>
+                <a:t>Secure Escrow Payments</a:t>
               </a:r>
-              <a:endParaRPr lang="en-US" sz="1600" dirty="0"/>
             </a:p>
             <a:p>
               <a:pPr marL="0" indent="0">
@@ -10655,7 +10652,7 @@
                     <a:srgbClr val="2C3E50"/>
                   </a:solidFill>
                 </a:rPr>
-                <a:t>Skills, portfolio, experience, and certifications</a:t>
+                <a:t>Milestone-based earnings released safely via Razorpay</a:t>
               </a:r>
               <a:endParaRPr lang="en-US" sz="1400" dirty="0"/>
             </a:p>
